--- a/manuscript/Figure1.v2.pptx
+++ b/manuscript/Figure1.v2.pptx
@@ -261,7 +261,7 @@
           <a:p>
             <a:fld id="{F99FA075-6547-664A-8D67-8D66DAFE2461}" type="datetimeFigureOut">
               <a:rPr lang="en-FR" smtClean="0"/>
-              <a:t>29/06/2026</a:t>
+              <a:t>06/07/2026</a:t>
             </a:fld>
             <a:endParaRPr lang="en-FR"/>
           </a:p>
@@ -461,7 +461,7 @@
           <a:p>
             <a:fld id="{F99FA075-6547-664A-8D67-8D66DAFE2461}" type="datetimeFigureOut">
               <a:rPr lang="en-FR" smtClean="0"/>
-              <a:t>29/06/2026</a:t>
+              <a:t>06/07/2026</a:t>
             </a:fld>
             <a:endParaRPr lang="en-FR"/>
           </a:p>
@@ -671,7 +671,7 @@
           <a:p>
             <a:fld id="{F99FA075-6547-664A-8D67-8D66DAFE2461}" type="datetimeFigureOut">
               <a:rPr lang="en-FR" smtClean="0"/>
-              <a:t>29/06/2026</a:t>
+              <a:t>06/07/2026</a:t>
             </a:fld>
             <a:endParaRPr lang="en-FR"/>
           </a:p>
@@ -871,7 +871,7 @@
           <a:p>
             <a:fld id="{F99FA075-6547-664A-8D67-8D66DAFE2461}" type="datetimeFigureOut">
               <a:rPr lang="en-FR" smtClean="0"/>
-              <a:t>29/06/2026</a:t>
+              <a:t>06/07/2026</a:t>
             </a:fld>
             <a:endParaRPr lang="en-FR"/>
           </a:p>
@@ -1147,7 +1147,7 @@
           <a:p>
             <a:fld id="{F99FA075-6547-664A-8D67-8D66DAFE2461}" type="datetimeFigureOut">
               <a:rPr lang="en-FR" smtClean="0"/>
-              <a:t>29/06/2026</a:t>
+              <a:t>06/07/2026</a:t>
             </a:fld>
             <a:endParaRPr lang="en-FR"/>
           </a:p>
@@ -1415,7 +1415,7 @@
           <a:p>
             <a:fld id="{F99FA075-6547-664A-8D67-8D66DAFE2461}" type="datetimeFigureOut">
               <a:rPr lang="en-FR" smtClean="0"/>
-              <a:t>29/06/2026</a:t>
+              <a:t>06/07/2026</a:t>
             </a:fld>
             <a:endParaRPr lang="en-FR"/>
           </a:p>
@@ -1830,7 +1830,7 @@
           <a:p>
             <a:fld id="{F99FA075-6547-664A-8D67-8D66DAFE2461}" type="datetimeFigureOut">
               <a:rPr lang="en-FR" smtClean="0"/>
-              <a:t>29/06/2026</a:t>
+              <a:t>06/07/2026</a:t>
             </a:fld>
             <a:endParaRPr lang="en-FR"/>
           </a:p>
@@ -1972,7 +1972,7 @@
           <a:p>
             <a:fld id="{F99FA075-6547-664A-8D67-8D66DAFE2461}" type="datetimeFigureOut">
               <a:rPr lang="en-FR" smtClean="0"/>
-              <a:t>29/06/2026</a:t>
+              <a:t>06/07/2026</a:t>
             </a:fld>
             <a:endParaRPr lang="en-FR"/>
           </a:p>
@@ -2085,7 +2085,7 @@
           <a:p>
             <a:fld id="{F99FA075-6547-664A-8D67-8D66DAFE2461}" type="datetimeFigureOut">
               <a:rPr lang="en-FR" smtClean="0"/>
-              <a:t>29/06/2026</a:t>
+              <a:t>06/07/2026</a:t>
             </a:fld>
             <a:endParaRPr lang="en-FR"/>
           </a:p>
@@ -2398,7 +2398,7 @@
           <a:p>
             <a:fld id="{F99FA075-6547-664A-8D67-8D66DAFE2461}" type="datetimeFigureOut">
               <a:rPr lang="en-FR" smtClean="0"/>
-              <a:t>29/06/2026</a:t>
+              <a:t>06/07/2026</a:t>
             </a:fld>
             <a:endParaRPr lang="en-FR"/>
           </a:p>
@@ -2687,7 +2687,7 @@
           <a:p>
             <a:fld id="{F99FA075-6547-664A-8D67-8D66DAFE2461}" type="datetimeFigureOut">
               <a:rPr lang="en-FR" smtClean="0"/>
-              <a:t>29/06/2026</a:t>
+              <a:t>06/07/2026</a:t>
             </a:fld>
             <a:endParaRPr lang="en-FR"/>
           </a:p>
@@ -2930,7 +2930,7 @@
           <a:p>
             <a:fld id="{F99FA075-6547-664A-8D67-8D66DAFE2461}" type="datetimeFigureOut">
               <a:rPr lang="en-FR" smtClean="0"/>
-              <a:t>29/06/2026</a:t>
+              <a:t>06/07/2026</a:t>
             </a:fld>
             <a:endParaRPr lang="en-FR"/>
           </a:p>
@@ -3333,6 +3333,16 @@
 <file path=ppt/slides/slide1.xml><?xml version="1.0" encoding="utf-8"?>
 <p:sld xmlns:a="http://schemas.openxmlformats.org/drawingml/2006/main" xmlns:r="http://schemas.openxmlformats.org/officeDocument/2006/relationships" xmlns:p="http://schemas.openxmlformats.org/presentationml/2006/main">
   <p:cSld>
+    <p:bg>
+      <p:bgPr>
+        <a:solidFill>
+          <a:schemeClr val="bg1">
+            <a:alpha val="47630"/>
+          </a:schemeClr>
+        </a:solidFill>
+        <a:effectLst/>
+      </p:bgPr>
+    </p:bg>
     <p:spTree>
       <p:nvGrpSpPr>
         <p:cNvPr id="1" name=""/>
@@ -3362,10 +3372,10 @@
           <p:nvPr/>
         </p:nvPicPr>
         <p:blipFill>
-          <a:blip r:embed="rId2">
+          <a:blip>
             <a:extLst>
               <a:ext uri="{96DAC541-7B7A-43D3-8B79-37D633B846F1}">
-                <asvg:svgBlip xmlns:asvg="http://schemas.microsoft.com/office/drawing/2016/SVG/main" r:embed="rId3"/>
+                <asvg:svgBlip xmlns:asvg="http://schemas.microsoft.com/office/drawing/2016/SVG/main" r:embed="rId2"/>
               </a:ext>
             </a:extLst>
           </a:blip>
@@ -3375,7 +3385,7 @@
         </p:blipFill>
         <p:spPr>
           <a:xfrm>
-            <a:off x="5261574" y="2939900"/>
+            <a:off x="5768203" y="2939900"/>
             <a:ext cx="2374900" cy="685800"/>
           </a:xfrm>
           <a:prstGeom prst="rect">
@@ -3397,8 +3407,8 @@
         </p:nvSpPr>
         <p:spPr>
           <a:xfrm>
-            <a:off x="5839337" y="3536801"/>
-            <a:ext cx="1219373" cy="646331"/>
+            <a:off x="6345966" y="3536801"/>
+            <a:ext cx="1226155" cy="646331"/>
           </a:xfrm>
           <a:prstGeom prst="rect">
             <a:avLst/>
@@ -3406,7 +3416,7 @@
           <a:noFill/>
         </p:spPr>
         <p:txBody>
-          <a:bodyPr wrap="none" rtlCol="0">
+          <a:bodyPr wrap="square" rtlCol="0">
             <a:spAutoFit/>
           </a:bodyPr>
           <a:lstStyle/>
@@ -3444,14 +3454,14 @@
           <p:nvPr/>
         </p:nvPicPr>
         <p:blipFill>
-          <a:blip r:embed="rId4"/>
+          <a:blip r:embed="rId3"/>
           <a:stretch>
             <a:fillRect/>
           </a:stretch>
         </p:blipFill>
         <p:spPr>
           <a:xfrm>
-            <a:off x="3694901" y="1436597"/>
+            <a:off x="4107102" y="819661"/>
             <a:ext cx="1146189" cy="888297"/>
           </a:xfrm>
           <a:prstGeom prst="rect">
@@ -3473,8 +3483,8 @@
         </p:nvSpPr>
         <p:spPr>
           <a:xfrm rot="19685777">
-            <a:off x="2264511" y="2162639"/>
-            <a:ext cx="1205305" cy="484632"/>
+            <a:off x="2125311" y="2173992"/>
+            <a:ext cx="2255487" cy="307468"/>
           </a:xfrm>
           <a:prstGeom prst="rightArrow">
             <a:avLst/>
@@ -3499,10 +3509,7 @@
           <a:lstStyle/>
           <a:p>
             <a:pPr algn="ctr"/>
-            <a:r>
-              <a:rPr lang="en-FR" dirty="0"/>
-              <a:t>A: read</a:t>
-            </a:r>
+            <a:endParaRPr lang="en-FR" dirty="0"/>
           </a:p>
         </p:txBody>
       </p:sp>
@@ -3520,8 +3527,8 @@
         </p:nvSpPr>
         <p:spPr>
           <a:xfrm rot="1957230">
-            <a:off x="5259980" y="2162639"/>
-            <a:ext cx="1306375" cy="484632"/>
+            <a:off x="5041995" y="2218926"/>
+            <a:ext cx="2060750" cy="303833"/>
           </a:xfrm>
           <a:prstGeom prst="rightArrow">
             <a:avLst/>
@@ -3546,10 +3553,7 @@
           <a:lstStyle/>
           <a:p>
             <a:pPr algn="ctr"/>
-            <a:r>
-              <a:rPr lang="en-FR" dirty="0"/>
-              <a:t>B: write</a:t>
-            </a:r>
+            <a:endParaRPr lang="en-FR" dirty="0"/>
           </a:p>
         </p:txBody>
       </p:sp>
@@ -3567,12 +3571,23 @@
         </p:nvSpPr>
         <p:spPr>
           <a:xfrm flipH="1">
-            <a:off x="3390546" y="3319200"/>
-            <a:ext cx="1735964" cy="484632"/>
+            <a:off x="3390545" y="3319200"/>
+            <a:ext cx="2455489" cy="484632"/>
           </a:xfrm>
           <a:prstGeom prst="rightArrow">
             <a:avLst/>
           </a:prstGeom>
+          <a:solidFill>
+            <a:schemeClr val="lt1">
+              <a:alpha val="30237"/>
+            </a:schemeClr>
+          </a:solidFill>
+          <a:ln>
+            <a:solidFill>
+              <a:schemeClr val="accent2"/>
+            </a:solidFill>
+            <a:prstDash val="dash"/>
+          </a:ln>
         </p:spPr>
         <p:style>
           <a:lnRef idx="2">
@@ -3595,8 +3610,13 @@
             <a:pPr algn="ctr"/>
             <a:r>
               <a:rPr lang="en-FR" dirty="0"/>
-              <a:t>C: read</a:t>
-            </a:r>
+              <a:t>C</a:t>
+            </a:r>
+            <a:r>
+              <a:rPr lang="en-FR"/>
+              <a:t>: import</a:t>
+            </a:r>
+            <a:endParaRPr lang="en-FR" dirty="0"/>
           </a:p>
         </p:txBody>
       </p:sp>
@@ -3704,10 +3724,10 @@
             <p:nvPr/>
           </p:nvPicPr>
           <p:blipFill>
-            <a:blip r:embed="rId2">
+            <a:blip>
               <a:extLst>
                 <a:ext uri="{96DAC541-7B7A-43D3-8B79-37D633B846F1}">
-                  <asvg:svgBlip xmlns:asvg="http://schemas.microsoft.com/office/drawing/2016/SVG/main" r:embed="rId3"/>
+                  <asvg:svgBlip xmlns:asvg="http://schemas.microsoft.com/office/drawing/2016/SVG/main" r:embed="rId2"/>
                 </a:ext>
               </a:extLst>
             </a:blip>
@@ -3786,7 +3806,7 @@
             <p:nvPr/>
           </p:nvPicPr>
           <p:blipFill>
-            <a:blip r:embed="rId5" r:link="rId6">
+            <a:blip r:embed="rId4" r:link="rId5">
               <a:extLst>
                 <a:ext uri="{28A0092B-C50C-407E-A947-70E740481C1C}">
                   <a14:useLocalDpi xmlns:a14="http://schemas.microsoft.com/office/drawing/2010/main" val="0"/>
@@ -3819,6 +3839,98 @@
           </p:spPr>
         </p:pic>
       </p:grpSp>
+      <p:sp>
+        <p:nvSpPr>
+          <p:cNvPr id="6" name="TextBox 5">
+            <a:extLst>
+              <a:ext uri="{FF2B5EF4-FFF2-40B4-BE49-F238E27FC236}">
+                <a16:creationId xmlns:a16="http://schemas.microsoft.com/office/drawing/2014/main" id="{FF96DE4A-2517-CD81-8129-250454B2B46E}"/>
+              </a:ext>
+            </a:extLst>
+          </p:cNvPr>
+          <p:cNvSpPr txBox="1"/>
+          <p:nvPr/>
+        </p:nvSpPr>
+        <p:spPr>
+          <a:xfrm>
+            <a:off x="2351723" y="2011586"/>
+            <a:ext cx="2096408" cy="646331"/>
+          </a:xfrm>
+          <a:prstGeom prst="rect">
+            <a:avLst/>
+          </a:prstGeom>
+          <a:solidFill>
+            <a:schemeClr val="lt1">
+              <a:alpha val="29941"/>
+            </a:schemeClr>
+          </a:solidFill>
+        </p:spPr>
+        <p:txBody>
+          <a:bodyPr wrap="none" rtlCol="0">
+            <a:spAutoFit/>
+          </a:bodyPr>
+          <a:lstStyle/>
+          <a:p>
+            <a:r>
+              <a:rPr lang="en-FR" dirty="0"/>
+              <a:t>A: read</a:t>
+            </a:r>
+          </a:p>
+          <a:p>
+            <a:r>
+              <a:rPr lang="en-FR" b="1" dirty="0"/>
+              <a:t>fj11_to_gatingset()</a:t>
+            </a:r>
+            <a:endParaRPr lang="en-FR" dirty="0"/>
+          </a:p>
+        </p:txBody>
+      </p:sp>
+      <p:sp>
+        <p:nvSpPr>
+          <p:cNvPr id="7" name="TextBox 6">
+            <a:extLst>
+              <a:ext uri="{FF2B5EF4-FFF2-40B4-BE49-F238E27FC236}">
+                <a16:creationId xmlns:a16="http://schemas.microsoft.com/office/drawing/2014/main" id="{737AF16C-7AD8-8315-7C6A-5A3234B89D33}"/>
+              </a:ext>
+            </a:extLst>
+          </p:cNvPr>
+          <p:cNvSpPr txBox="1"/>
+          <p:nvPr/>
+        </p:nvSpPr>
+        <p:spPr>
+          <a:xfrm>
+            <a:off x="5126510" y="2059302"/>
+            <a:ext cx="3247107" cy="646331"/>
+          </a:xfrm>
+          <a:prstGeom prst="rect">
+            <a:avLst/>
+          </a:prstGeom>
+          <a:solidFill>
+            <a:schemeClr val="lt1">
+              <a:alpha val="29631"/>
+            </a:schemeClr>
+          </a:solidFill>
+        </p:spPr>
+        <p:txBody>
+          <a:bodyPr wrap="none" rtlCol="0">
+            <a:spAutoFit/>
+          </a:bodyPr>
+          <a:lstStyle/>
+          <a:p>
+            <a:r>
+              <a:rPr lang="en-FR" dirty="0"/>
+              <a:t>B: write</a:t>
+            </a:r>
+          </a:p>
+          <a:p>
+            <a:r>
+              <a:rPr lang="en-FR" b="1" dirty="0"/>
+              <a:t>export_flowjo10_workspace()</a:t>
+            </a:r>
+            <a:endParaRPr lang="en-FR" dirty="0"/>
+          </a:p>
+        </p:txBody>
+      </p:sp>
     </p:spTree>
     <p:extLst>
       <p:ext uri="{BB962C8B-B14F-4D97-AF65-F5344CB8AC3E}">
